--- a/CalendarioAgo26/presentaciones/10_DiccionariosTuplas.pptx
+++ b/CalendarioAgo26/presentaciones/10_DiccionariosTuplas.pptx
@@ -142,6 +142,35 @@
 </p:presentation>
 </file>
 
+<file path=ppt/changesInfos/changesInfo1.xml><?xml version="1.0" encoding="utf-8"?>
+<pc:chgInfo xmlns:a="http://schemas.openxmlformats.org/drawingml/2006/main" xmlns:r="http://schemas.openxmlformats.org/officeDocument/2006/relationships" xmlns:ac="http://schemas.microsoft.com/office/drawing/2013/main/command" xmlns:pc="http://schemas.microsoft.com/office/powerpoint/2013/main/command">
+  <pc:docChgLst>
+    <pc:chgData name="Lizethe Pérez Fuertes" userId="4ae9ef87-2a7d-42f8-8dfa-0a501a9e2ff4" providerId="ADAL" clId="{FDDD45CB-1330-4033-A842-3D2746AFF7C7}"/>
+    <pc:docChg chg="modSld">
+      <pc:chgData name="Lizethe Pérez Fuertes" userId="4ae9ef87-2a7d-42f8-8dfa-0a501a9e2ff4" providerId="ADAL" clId="{FDDD45CB-1330-4033-A842-3D2746AFF7C7}" dt="2026-08-11T16:24:42.599" v="11" actId="20577"/>
+      <pc:docMkLst>
+        <pc:docMk/>
+      </pc:docMkLst>
+      <pc:sldChg chg="modSp mod">
+        <pc:chgData name="Lizethe Pérez Fuertes" userId="4ae9ef87-2a7d-42f8-8dfa-0a501a9e2ff4" providerId="ADAL" clId="{FDDD45CB-1330-4033-A842-3D2746AFF7C7}" dt="2026-08-11T16:24:42.599" v="11" actId="20577"/>
+        <pc:sldMkLst>
+          <pc:docMk/>
+          <pc:sldMk cId="1182132109" sldId="283"/>
+        </pc:sldMkLst>
+        <pc:spChg chg="mod">
+          <ac:chgData name="Lizethe Pérez Fuertes" userId="4ae9ef87-2a7d-42f8-8dfa-0a501a9e2ff4" providerId="ADAL" clId="{FDDD45CB-1330-4033-A842-3D2746AFF7C7}" dt="2026-08-11T16:24:42.599" v="11" actId="20577"/>
+          <ac:spMkLst>
+            <pc:docMk/>
+            <pc:sldMk cId="1182132109" sldId="283"/>
+            <ac:spMk id="5" creationId="{ABAFA35F-C11B-4B08-A294-DA8C5325E232}"/>
+          </ac:spMkLst>
+        </pc:spChg>
+      </pc:sldChg>
+    </pc:docChg>
+  </pc:docChgLst>
+</pc:chgInfo>
+</file>
+
 <file path=ppt/notesMasters/notesMaster1.xml><?xml version="1.0" encoding="utf-8"?>
 <p:notesMaster xmlns:a="http://schemas.openxmlformats.org/drawingml/2006/main" xmlns:r="http://schemas.openxmlformats.org/officeDocument/2006/relationships" xmlns:p="http://schemas.openxmlformats.org/presentationml/2006/main">
   <p:cSld>
@@ -224,7 +253,7 @@
           <a:p>
             <a:fld id="{59C7E2AA-6A4C-4042-9554-ED2A913B287A}" type="datetimeFigureOut">
               <a:rPr lang="es-MX" smtClean="0"/>
-              <a:t>20/02/2025</a:t>
+              <a:t>11/08/2026</a:t>
             </a:fld>
             <a:endParaRPr lang="es-MX" dirty="0"/>
           </a:p>
@@ -383,7 +412,7 @@
           <a:p>
             <a:fld id="{696058A4-74A4-4E49-9DDB-7D0AF71A622B}" type="slidenum">
               <a:rPr lang="es-MX" smtClean="0"/>
-              <a:t>‹#›</a:t>
+              <a:t>‹Nº›</a:t>
             </a:fld>
             <a:endParaRPr lang="es-MX" dirty="0"/>
           </a:p>
@@ -2683,7 +2712,7 @@
           <a:p>
             <a:fld id="{BAE3B62E-9D6B-4C41-BFE5-D19C53A0513B}" type="datetimeFigureOut">
               <a:rPr lang="es-MX" smtClean="0"/>
-              <a:t>20/02/2025</a:t>
+              <a:t>11/08/2026</a:t>
             </a:fld>
             <a:endParaRPr lang="es-MX" dirty="0"/>
           </a:p>
@@ -2725,7 +2754,7 @@
           <a:p>
             <a:fld id="{92823904-E0C3-4D45-A85E-A4B4FAD16498}" type="slidenum">
               <a:rPr lang="es-MX" smtClean="0"/>
-              <a:t>‹#›</a:t>
+              <a:t>‹Nº›</a:t>
             </a:fld>
             <a:endParaRPr lang="es-MX" dirty="0"/>
           </a:p>
@@ -2853,7 +2882,7 @@
           <a:p>
             <a:fld id="{BAE3B62E-9D6B-4C41-BFE5-D19C53A0513B}" type="datetimeFigureOut">
               <a:rPr lang="es-MX" smtClean="0"/>
-              <a:t>20/02/2025</a:t>
+              <a:t>11/08/2026</a:t>
             </a:fld>
             <a:endParaRPr lang="es-MX" dirty="0"/>
           </a:p>
@@ -2895,7 +2924,7 @@
           <a:p>
             <a:fld id="{92823904-E0C3-4D45-A85E-A4B4FAD16498}" type="slidenum">
               <a:rPr lang="es-MX" smtClean="0"/>
-              <a:t>‹#›</a:t>
+              <a:t>‹Nº›</a:t>
             </a:fld>
             <a:endParaRPr lang="es-MX" dirty="0"/>
           </a:p>
@@ -3033,7 +3062,7 @@
           <a:p>
             <a:fld id="{BAE3B62E-9D6B-4C41-BFE5-D19C53A0513B}" type="datetimeFigureOut">
               <a:rPr lang="es-MX" smtClean="0"/>
-              <a:t>20/02/2025</a:t>
+              <a:t>11/08/2026</a:t>
             </a:fld>
             <a:endParaRPr lang="es-MX" dirty="0"/>
           </a:p>
@@ -3075,7 +3104,7 @@
           <a:p>
             <a:fld id="{92823904-E0C3-4D45-A85E-A4B4FAD16498}" type="slidenum">
               <a:rPr lang="es-MX" smtClean="0"/>
-              <a:t>‹#›</a:t>
+              <a:t>‹Nº›</a:t>
             </a:fld>
             <a:endParaRPr lang="es-MX" dirty="0"/>
           </a:p>
@@ -3186,7 +3215,7 @@
           <a:p>
             <a:fld id="{1D8BD707-D9CF-40AE-B4C6-C98DA3205C09}" type="datetimeFigureOut">
               <a:rPr lang="en-US" smtClean="0"/>
-              <a:t>2/20/2025</a:t>
+              <a:t>8/11/2026</a:t>
             </a:fld>
             <a:endParaRPr lang="en-US"/>
           </a:p>
@@ -3216,7 +3245,7 @@
                 <a:cs typeface="Calibri"/>
               </a:rPr>
               <a:pPr marL="25400"/>
-              <a:t>‹#›</a:t>
+              <a:t>‹Nº›</a:t>
             </a:fld>
             <a:endParaRPr lang="es-MX">
               <a:cs typeface="Calibri"/>
@@ -3346,7 +3375,7 @@
           <a:p>
             <a:fld id="{BAE3B62E-9D6B-4C41-BFE5-D19C53A0513B}" type="datetimeFigureOut">
               <a:rPr lang="es-MX" smtClean="0"/>
-              <a:t>20/02/2025</a:t>
+              <a:t>11/08/2026</a:t>
             </a:fld>
             <a:endParaRPr lang="es-MX" dirty="0"/>
           </a:p>
@@ -3388,7 +3417,7 @@
           <a:p>
             <a:fld id="{92823904-E0C3-4D45-A85E-A4B4FAD16498}" type="slidenum">
               <a:rPr lang="es-MX" smtClean="0"/>
-              <a:t>‹#›</a:t>
+              <a:t>‹Nº›</a:t>
             </a:fld>
             <a:endParaRPr lang="es-MX" dirty="0"/>
           </a:p>
@@ -3592,7 +3621,7 @@
           <a:p>
             <a:fld id="{BAE3B62E-9D6B-4C41-BFE5-D19C53A0513B}" type="datetimeFigureOut">
               <a:rPr lang="es-MX" smtClean="0"/>
-              <a:t>20/02/2025</a:t>
+              <a:t>11/08/2026</a:t>
             </a:fld>
             <a:endParaRPr lang="es-MX" dirty="0"/>
           </a:p>
@@ -3634,7 +3663,7 @@
           <a:p>
             <a:fld id="{92823904-E0C3-4D45-A85E-A4B4FAD16498}" type="slidenum">
               <a:rPr lang="es-MX" smtClean="0"/>
-              <a:t>‹#›</a:t>
+              <a:t>‹Nº›</a:t>
             </a:fld>
             <a:endParaRPr lang="es-MX" dirty="0"/>
           </a:p>
@@ -3880,7 +3909,7 @@
           <a:p>
             <a:fld id="{BAE3B62E-9D6B-4C41-BFE5-D19C53A0513B}" type="datetimeFigureOut">
               <a:rPr lang="es-MX" smtClean="0"/>
-              <a:t>20/02/2025</a:t>
+              <a:t>11/08/2026</a:t>
             </a:fld>
             <a:endParaRPr lang="es-MX" dirty="0"/>
           </a:p>
@@ -3922,7 +3951,7 @@
           <a:p>
             <a:fld id="{92823904-E0C3-4D45-A85E-A4B4FAD16498}" type="slidenum">
               <a:rPr lang="es-MX" smtClean="0"/>
-              <a:t>‹#›</a:t>
+              <a:t>‹Nº›</a:t>
             </a:fld>
             <a:endParaRPr lang="es-MX" dirty="0"/>
           </a:p>
@@ -4302,7 +4331,7 @@
           <a:p>
             <a:fld id="{BAE3B62E-9D6B-4C41-BFE5-D19C53A0513B}" type="datetimeFigureOut">
               <a:rPr lang="es-MX" smtClean="0"/>
-              <a:t>20/02/2025</a:t>
+              <a:t>11/08/2026</a:t>
             </a:fld>
             <a:endParaRPr lang="es-MX" dirty="0"/>
           </a:p>
@@ -4344,7 +4373,7 @@
           <a:p>
             <a:fld id="{92823904-E0C3-4D45-A85E-A4B4FAD16498}" type="slidenum">
               <a:rPr lang="es-MX" smtClean="0"/>
-              <a:t>‹#›</a:t>
+              <a:t>‹Nº›</a:t>
             </a:fld>
             <a:endParaRPr lang="es-MX" dirty="0"/>
           </a:p>
@@ -4420,7 +4449,7 @@
           <a:p>
             <a:fld id="{BAE3B62E-9D6B-4C41-BFE5-D19C53A0513B}" type="datetimeFigureOut">
               <a:rPr lang="es-MX" smtClean="0"/>
-              <a:t>20/02/2025</a:t>
+              <a:t>11/08/2026</a:t>
             </a:fld>
             <a:endParaRPr lang="es-MX" dirty="0"/>
           </a:p>
@@ -4462,7 +4491,7 @@
           <a:p>
             <a:fld id="{92823904-E0C3-4D45-A85E-A4B4FAD16498}" type="slidenum">
               <a:rPr lang="es-MX" smtClean="0"/>
-              <a:t>‹#›</a:t>
+              <a:t>‹Nº›</a:t>
             </a:fld>
             <a:endParaRPr lang="es-MX" dirty="0"/>
           </a:p>
@@ -4515,7 +4544,7 @@
           <a:p>
             <a:fld id="{BAE3B62E-9D6B-4C41-BFE5-D19C53A0513B}" type="datetimeFigureOut">
               <a:rPr lang="es-MX" smtClean="0"/>
-              <a:t>20/02/2025</a:t>
+              <a:t>11/08/2026</a:t>
             </a:fld>
             <a:endParaRPr lang="es-MX" dirty="0"/>
           </a:p>
@@ -4557,7 +4586,7 @@
           <a:p>
             <a:fld id="{92823904-E0C3-4D45-A85E-A4B4FAD16498}" type="slidenum">
               <a:rPr lang="es-MX" smtClean="0"/>
-              <a:t>‹#›</a:t>
+              <a:t>‹Nº›</a:t>
             </a:fld>
             <a:endParaRPr lang="es-MX" dirty="0"/>
           </a:p>
@@ -4792,7 +4821,7 @@
           <a:p>
             <a:fld id="{BAE3B62E-9D6B-4C41-BFE5-D19C53A0513B}" type="datetimeFigureOut">
               <a:rPr lang="es-MX" smtClean="0"/>
-              <a:t>20/02/2025</a:t>
+              <a:t>11/08/2026</a:t>
             </a:fld>
             <a:endParaRPr lang="es-MX" dirty="0"/>
           </a:p>
@@ -4834,7 +4863,7 @@
           <a:p>
             <a:fld id="{92823904-E0C3-4D45-A85E-A4B4FAD16498}" type="slidenum">
               <a:rPr lang="es-MX" smtClean="0"/>
-              <a:t>‹#›</a:t>
+              <a:t>‹Nº›</a:t>
             </a:fld>
             <a:endParaRPr lang="es-MX" dirty="0"/>
           </a:p>
@@ -5045,7 +5074,7 @@
           <a:p>
             <a:fld id="{BAE3B62E-9D6B-4C41-BFE5-D19C53A0513B}" type="datetimeFigureOut">
               <a:rPr lang="es-MX" smtClean="0"/>
-              <a:t>20/02/2025</a:t>
+              <a:t>11/08/2026</a:t>
             </a:fld>
             <a:endParaRPr lang="es-MX" dirty="0"/>
           </a:p>
@@ -5087,7 +5116,7 @@
           <a:p>
             <a:fld id="{92823904-E0C3-4D45-A85E-A4B4FAD16498}" type="slidenum">
               <a:rPr lang="es-MX" smtClean="0"/>
-              <a:t>‹#›</a:t>
+              <a:t>‹Nº›</a:t>
             </a:fld>
             <a:endParaRPr lang="es-MX" dirty="0"/>
           </a:p>
@@ -5258,7 +5287,7 @@
           <a:p>
             <a:fld id="{BAE3B62E-9D6B-4C41-BFE5-D19C53A0513B}" type="datetimeFigureOut">
               <a:rPr lang="es-MX" smtClean="0"/>
-              <a:t>20/02/2025</a:t>
+              <a:t>11/08/2026</a:t>
             </a:fld>
             <a:endParaRPr lang="es-MX" dirty="0"/>
           </a:p>
@@ -5336,7 +5365,7 @@
           <a:p>
             <a:fld id="{92823904-E0C3-4D45-A85E-A4B4FAD16498}" type="slidenum">
               <a:rPr lang="es-MX" smtClean="0"/>
-              <a:t>‹#›</a:t>
+              <a:t>‹Nº›</a:t>
             </a:fld>
             <a:endParaRPr lang="es-MX" dirty="0"/>
           </a:p>
@@ -5781,7 +5810,7 @@
                   </a:schemeClr>
                 </a:solidFill>
               </a:rPr>
-              <a:t>TC 3001 C </a:t>
+              <a:t>TI 3008 C </a:t>
             </a:r>
             <a:br>
               <a:rPr lang="es-MX" sz="3200" dirty="0">
